--- a/Presentation_BrunoBiscay.pptx
+++ b/Presentation_BrunoBiscay.pptx
@@ -5,10 +5,10 @@
     <p:sldMasterId id="2147483712" r:id="rId1"/>
   </p:sldMasterIdLst>
   <p:notesMasterIdLst>
-    <p:notesMasterId r:id="rId12"/>
+    <p:notesMasterId r:id="rId13"/>
   </p:notesMasterIdLst>
   <p:handoutMasterIdLst>
-    <p:handoutMasterId r:id="rId13"/>
+    <p:handoutMasterId r:id="rId14"/>
   </p:handoutMasterIdLst>
   <p:sldIdLst>
     <p:sldId id="257" r:id="rId2"/>
@@ -19,8 +19,9 @@
     <p:sldId id="263" r:id="rId7"/>
     <p:sldId id="264" r:id="rId8"/>
     <p:sldId id="265" r:id="rId9"/>
-    <p:sldId id="266" r:id="rId10"/>
+    <p:sldId id="267" r:id="rId10"/>
     <p:sldId id="262" r:id="rId11"/>
+    <p:sldId id="268" r:id="rId12"/>
   </p:sldIdLst>
   <p:sldSz cx="12192000" cy="6858000"/>
   <p:notesSz cx="6858000" cy="9144000"/>
@@ -4454,7 +4455,7 @@
             <a:pPr rtl="0"/>
             <a:fld id="{2FC74BDE-6627-49B6-90F1-0334E723F64C}" type="datetime1">
               <a:rPr lang="fr-FR" smtClean="0"/>
-              <a:t>21/06/2026</a:t>
+              <a:t>29/06/2026</a:t>
             </a:fld>
             <a:endParaRPr lang="en-US" dirty="0"/>
           </a:p>
@@ -4624,7 +4625,7 @@
             <a:pPr rtl="0"/>
             <a:fld id="{F28DAF60-E56A-4648-8936-22D801672B6C}" type="datetime1">
               <a:rPr lang="fr-FR" smtClean="0"/>
-              <a:t>21/06/2026</a:t>
+              <a:t>29/06/2026</a:t>
             </a:fld>
             <a:endParaRPr lang="en-US"/>
           </a:p>
@@ -5296,7 +5297,7 @@
             <a:pPr rtl="0"/>
             <a:fld id="{F28DAF60-E56A-4648-8936-22D801672B6C}" type="datetime1">
               <a:rPr lang="fr-FR" smtClean="0"/>
-              <a:t>21/06/2026</a:t>
+              <a:t>29/06/2026</a:t>
             </a:fld>
             <a:endParaRPr lang="en-US"/>
           </a:p>
@@ -5405,7 +5406,7 @@
             <a:pPr rtl="0"/>
             <a:fld id="{F28DAF60-E56A-4648-8936-22D801672B6C}" type="datetime1">
               <a:rPr lang="fr-FR" smtClean="0"/>
-              <a:t>21/06/2026</a:t>
+              <a:t>29/06/2026</a:t>
             </a:fld>
             <a:endParaRPr lang="en-US"/>
           </a:p>
@@ -5674,7 +5675,7 @@
             <a:pPr rtl="0"/>
             <a:fld id="{F28DAF60-E56A-4648-8936-22D801672B6C}" type="datetime1">
               <a:rPr lang="fr-FR" smtClean="0"/>
-              <a:t>21/06/2026</a:t>
+              <a:t>29/06/2026</a:t>
             </a:fld>
             <a:endParaRPr lang="en-US"/>
           </a:p>
@@ -5783,7 +5784,7 @@
             <a:pPr rtl="0"/>
             <a:fld id="{F28DAF60-E56A-4648-8936-22D801672B6C}" type="datetime1">
               <a:rPr lang="fr-FR" smtClean="0"/>
-              <a:t>21/06/2026</a:t>
+              <a:t>29/06/2026</a:t>
             </a:fld>
             <a:endParaRPr lang="en-US"/>
           </a:p>
@@ -5926,7 +5927,7 @@
             <a:pPr rtl="0"/>
             <a:fld id="{F28DAF60-E56A-4648-8936-22D801672B6C}" type="datetime1">
               <a:rPr lang="fr-FR" smtClean="0"/>
-              <a:t>21/06/2026</a:t>
+              <a:t>29/06/2026</a:t>
             </a:fld>
             <a:endParaRPr lang="en-US"/>
           </a:p>
@@ -6035,7 +6036,7 @@
             <a:pPr rtl="0"/>
             <a:fld id="{F28DAF60-E56A-4648-8936-22D801672B6C}" type="datetime1">
               <a:rPr lang="fr-FR" smtClean="0"/>
-              <a:t>21/06/2026</a:t>
+              <a:t>30/06/2026</a:t>
             </a:fld>
             <a:endParaRPr lang="en-US"/>
           </a:p>
@@ -6059,7 +6060,7 @@
             <a:pPr rtl="0"/>
             <a:fld id="{01B41D33-19C8-4450-B3C5-BE83E9C8F0BC}" type="slidenum">
               <a:rPr lang="en-US" smtClean="0"/>
-              <a:t>9</a:t>
+              <a:t>10</a:t>
             </a:fld>
             <a:endParaRPr lang="en-US"/>
           </a:p>
@@ -6068,7 +6069,7 @@
     </p:spTree>
     <p:extLst>
       <p:ext uri="{BB962C8B-B14F-4D97-AF65-F5344CB8AC3E}">
-        <p14:creationId xmlns:p14="http://schemas.microsoft.com/office/powerpoint/2010/main" val="2725595162"/>
+        <p14:creationId xmlns:p14="http://schemas.microsoft.com/office/powerpoint/2010/main" val="3125148006"/>
       </p:ext>
     </p:extLst>
   </p:cSld>
@@ -6144,7 +6145,7 @@
             <a:pPr rtl="0"/>
             <a:fld id="{F28DAF60-E56A-4648-8936-22D801672B6C}" type="datetime1">
               <a:rPr lang="fr-FR" smtClean="0"/>
-              <a:t>21/06/2026</a:t>
+              <a:t>30/06/2026</a:t>
             </a:fld>
             <a:endParaRPr lang="en-US"/>
           </a:p>
@@ -6168,7 +6169,7 @@
             <a:pPr rtl="0"/>
             <a:fld id="{01B41D33-19C8-4450-B3C5-BE83E9C8F0BC}" type="slidenum">
               <a:rPr lang="en-US" smtClean="0"/>
-              <a:t>10</a:t>
+              <a:t>11</a:t>
             </a:fld>
             <a:endParaRPr lang="en-US"/>
           </a:p>
@@ -6177,7 +6178,7 @@
     </p:spTree>
     <p:extLst>
       <p:ext uri="{BB962C8B-B14F-4D97-AF65-F5344CB8AC3E}">
-        <p14:creationId xmlns:p14="http://schemas.microsoft.com/office/powerpoint/2010/main" val="3125148006"/>
+        <p14:creationId xmlns:p14="http://schemas.microsoft.com/office/powerpoint/2010/main" val="224072439"/>
       </p:ext>
     </p:extLst>
   </p:cSld>
@@ -6428,7 +6429,7 @@
             <a:pPr rtl="0"/>
             <a:fld id="{E641DF6C-ECED-4BD8-8025-73323DD5D35C}" type="datetime1">
               <a:rPr lang="fr-FR" smtClean="0"/>
-              <a:t>21/06/2026</a:t>
+              <a:t>29/06/2026</a:t>
             </a:fld>
             <a:endParaRPr lang="en-US" dirty="0"/>
           </a:p>
@@ -6635,7 +6636,7 @@
             <a:pPr rtl="0"/>
             <a:fld id="{1E5B03D9-FC89-4784-BD60-336471BA7724}" type="datetime1">
               <a:rPr lang="fr-FR" smtClean="0"/>
-              <a:t>21/06/2026</a:t>
+              <a:t>29/06/2026</a:t>
             </a:fld>
             <a:endParaRPr lang="en-US" dirty="0"/>
           </a:p>
@@ -7001,7 +7002,7 @@
             <a:pPr rtl="0"/>
             <a:fld id="{D0216CB3-B929-446C-876F-83C9B86D9FDE}" type="datetime1">
               <a:rPr lang="fr-FR" smtClean="0"/>
-              <a:t>21/06/2026</a:t>
+              <a:t>29/06/2026</a:t>
             </a:fld>
             <a:endParaRPr lang="en-US" dirty="0"/>
           </a:p>
@@ -7203,7 +7204,7 @@
             <a:pPr rtl="0"/>
             <a:fld id="{22897033-9A55-4DAC-991D-1FF1921C78B7}" type="datetime1">
               <a:rPr lang="fr-FR" smtClean="0"/>
-              <a:t>21/06/2026</a:t>
+              <a:t>29/06/2026</a:t>
             </a:fld>
             <a:endParaRPr lang="en-US" dirty="0"/>
           </a:p>
@@ -7519,7 +7520,7 @@
             <a:pPr rtl="0"/>
             <a:fld id="{A1255F31-5DB3-4925-BA87-822F5B17A2F1}" type="datetime1">
               <a:rPr lang="fr-FR" smtClean="0"/>
-              <a:t>21/06/2026</a:t>
+              <a:t>29/06/2026</a:t>
             </a:fld>
             <a:endParaRPr lang="en-US" dirty="0"/>
           </a:p>
@@ -7776,7 +7777,7 @@
             <a:pPr rtl="0"/>
             <a:fld id="{7E4EF44C-5F50-4A80-A957-57B3338337C0}" type="datetime1">
               <a:rPr lang="fr-FR" smtClean="0"/>
-              <a:t>21/06/2026</a:t>
+              <a:t>29/06/2026</a:t>
             </a:fld>
             <a:endParaRPr lang="en-US" dirty="0"/>
           </a:p>
@@ -8202,7 +8203,7 @@
             <a:pPr rtl="0"/>
             <a:fld id="{B2D0F46D-59FD-4484-924E-E79DD516B5ED}" type="datetime1">
               <a:rPr lang="fr-FR" smtClean="0"/>
-              <a:t>21/06/2026</a:t>
+              <a:t>29/06/2026</a:t>
             </a:fld>
             <a:endParaRPr lang="en-US" dirty="0"/>
           </a:p>
@@ -8329,7 +8330,7 @@
             <a:pPr rtl="0"/>
             <a:fld id="{0FAEC910-4AAA-42A1-A49C-7DDC64BC53C6}" type="datetime1">
               <a:rPr lang="fr-FR" smtClean="0"/>
-              <a:t>21/06/2026</a:t>
+              <a:t>29/06/2026</a:t>
             </a:fld>
             <a:endParaRPr lang="en-US" dirty="0"/>
           </a:p>
@@ -8427,7 +8428,7 @@
             <a:pPr rtl="0"/>
             <a:fld id="{ACEC98BE-FCE2-445F-8146-3A7F8CC3881D}" type="datetime1">
               <a:rPr lang="fr-FR" smtClean="0"/>
-              <a:t>21/06/2026</a:t>
+              <a:t>29/06/2026</a:t>
             </a:fld>
             <a:endParaRPr lang="en-US" dirty="0"/>
           </a:p>
@@ -8808,7 +8809,7 @@
             <a:pPr rtl="0"/>
             <a:fld id="{6D0953DD-A6BD-427D-B7A8-BDE378B2E678}" type="datetime1">
               <a:rPr lang="fr-FR" smtClean="0"/>
-              <a:t>21/06/2026</a:t>
+              <a:t>29/06/2026</a:t>
             </a:fld>
             <a:endParaRPr lang="en-US" dirty="0"/>
           </a:p>
@@ -9106,7 +9107,7 @@
             <a:pPr rtl="0"/>
             <a:fld id="{47E77B56-6788-4F40-A65E-12AFEB3AC095}" type="datetime1">
               <a:rPr lang="fr-FR" smtClean="0"/>
-              <a:t>21/06/2026</a:t>
+              <a:t>29/06/2026</a:t>
             </a:fld>
             <a:endParaRPr lang="en-US" dirty="0"/>
           </a:p>
@@ -9324,7 +9325,7 @@
             <a:pPr rtl="0"/>
             <a:fld id="{E69A0D1A-B1A6-4A33-B3AE-513EF3B4A7E7}" type="datetime1">
               <a:rPr lang="fr-FR" smtClean="0"/>
-              <a:t>21/06/2026</a:t>
+              <a:t>29/06/2026</a:t>
             </a:fld>
             <a:endParaRPr lang="en-US" dirty="0"/>
           </a:p>
@@ -10391,34 +10392,6 @@
       </p:grpSpPr>
       <p:sp>
         <p:nvSpPr>
-          <p:cNvPr id="2" name="Titre 1">
-            <a:extLst>
-              <a:ext uri="{FF2B5EF4-FFF2-40B4-BE49-F238E27FC236}">
-                <a16:creationId xmlns:a16="http://schemas.microsoft.com/office/drawing/2014/main" id="{2317C321-CD47-C68E-B6DD-6FAF07D7330C}"/>
-              </a:ext>
-            </a:extLst>
-          </p:cNvPr>
-          <p:cNvSpPr>
-            <a:spLocks noGrp="1"/>
-          </p:cNvSpPr>
-          <p:nvPr>
-            <p:ph type="title"/>
-          </p:nvPr>
-        </p:nvSpPr>
-        <p:spPr/>
-        <p:txBody>
-          <a:bodyPr/>
-          <a:lstStyle/>
-          <a:p>
-            <a:r>
-              <a:rPr lang="fr-FR" dirty="0"/>
-              <a:t>POST DONE</a:t>
-            </a:r>
-          </a:p>
-        </p:txBody>
-      </p:sp>
-      <p:sp>
-        <p:nvSpPr>
           <p:cNvPr id="3" name="Espace réservé du contenu 2">
             <a:extLst>
               <a:ext uri="{FF2B5EF4-FFF2-40B4-BE49-F238E27FC236}">
@@ -10433,7 +10406,12 @@
             <p:ph idx="1"/>
           </p:nvPr>
         </p:nvSpPr>
-        <p:spPr/>
+        <p:spPr>
+          <a:xfrm>
+            <a:off x="581192" y="1336809"/>
+            <a:ext cx="6584242" cy="5452229"/>
+          </a:xfrm>
+        </p:spPr>
         <p:txBody>
           <a:bodyPr>
             <a:normAutofit/>
@@ -10441,31 +10419,104 @@
           <a:lstStyle/>
           <a:p>
             <a:r>
+              <a:rPr lang="fr-FR" sz="1800" dirty="0"/>
+              <a:t>Quel que soit l’OS client, les images sur </a:t>
+            </a:r>
+            <a:r>
+              <a:rPr lang="fr-FR" sz="1800" dirty="0" err="1"/>
+              <a:t>DockerHub</a:t>
+            </a:r>
+            <a:r>
+              <a:rPr lang="fr-FR" sz="1800" dirty="0"/>
+              <a:t> permettent un déploiement simple et à jour</a:t>
+            </a:r>
+          </a:p>
+          <a:p>
+            <a:r>
+              <a:rPr lang="fr-FR" sz="1800" dirty="0"/>
+              <a:t>Le module de réentrainement permet de suivre l’évolution du besoin métier</a:t>
+            </a:r>
+          </a:p>
+          <a:p>
+            <a:r>
+              <a:rPr lang="fr-FR" sz="1800" dirty="0"/>
+              <a:t>La base de données peut intégrer de nouvelles variables (données capteur par exemple)</a:t>
+            </a:r>
+          </a:p>
+          <a:p>
+            <a:endParaRPr lang="en-US" dirty="0"/>
+          </a:p>
+          <a:p>
+            <a:r>
+              <a:rPr lang="en-US" sz="1800" dirty="0"/>
+              <a:t>Pour </a:t>
+            </a:r>
+            <a:r>
+              <a:rPr lang="en-US" sz="1800" dirty="0" err="1"/>
+              <a:t>aller</a:t>
+            </a:r>
+            <a:r>
+              <a:rPr lang="en-US" sz="1800" dirty="0"/>
+              <a:t> plus loin, à considerer avec le client final</a:t>
+            </a:r>
+          </a:p>
+          <a:p>
+            <a:pPr lvl="1"/>
+            <a:r>
+              <a:rPr lang="en-US" dirty="0"/>
+              <a:t>Les aspects </a:t>
+            </a:r>
+            <a:r>
               <a:rPr lang="en-US" dirty="0" err="1"/>
-              <a:t>Régression</a:t>
+              <a:t>sécurité</a:t>
             </a:r>
             <a:r>
               <a:rPr lang="en-US" dirty="0"/>
-              <a:t> </a:t>
+              <a:t> (certificate webs et API)</a:t>
+            </a:r>
+          </a:p>
+          <a:p>
+            <a:pPr lvl="1"/>
+            <a:r>
+              <a:rPr lang="en-US" dirty="0"/>
+              <a:t>Haute </a:t>
             </a:r>
             <a:r>
               <a:rPr lang="en-US" dirty="0" err="1"/>
-              <a:t>ordinale</a:t>
+              <a:t>disponibilité</a:t>
+            </a:r>
+            <a:r>
+              <a:rPr lang="en-US" dirty="0"/>
+              <a:t>: </a:t>
+            </a:r>
+            <a:r>
+              <a:rPr lang="en-US" dirty="0" err="1"/>
+              <a:t>sauvegarde</a:t>
+            </a:r>
+            <a:r>
+              <a:rPr lang="en-US" dirty="0"/>
+              <a:t>, </a:t>
+            </a:r>
+            <a:r>
+              <a:rPr lang="en-US" dirty="0" err="1"/>
+              <a:t>redondance</a:t>
             </a:r>
             <a:endParaRPr lang="en-US" dirty="0"/>
           </a:p>
           <a:p>
+            <a:pPr lvl="1"/>
             <a:r>
               <a:rPr lang="en-US" dirty="0"/>
-              <a:t>Docker SWARM</a:t>
-            </a:r>
-          </a:p>
-          <a:p>
+              <a:t>Supervision: à la charge/avec les </a:t>
+            </a:r>
             <a:r>
               <a:rPr lang="en-US" dirty="0" err="1"/>
-              <a:t>Certificat</a:t>
-            </a:r>
-            <a:endParaRPr lang="en-US" dirty="0"/>
+              <a:t>outils</a:t>
+            </a:r>
+            <a:r>
+              <a:rPr lang="en-US" dirty="0"/>
+              <a:t> clients</a:t>
+            </a:r>
           </a:p>
         </p:txBody>
       </p:sp>
@@ -10493,18 +10544,129 @@
             <a:pPr rtl="0"/>
             <a:fld id="{22897033-9A55-4DAC-991D-1FF1921C78B7}" type="datetime1">
               <a:rPr lang="fr-FR" smtClean="0"/>
-              <a:t>21/06/2026</a:t>
+              <a:t>30/06/2026</a:t>
             </a:fld>
             <a:endParaRPr lang="en-US" dirty="0"/>
+          </a:p>
+        </p:txBody>
+      </p:sp>
+      <p:sp>
+        <p:nvSpPr>
+          <p:cNvPr id="5" name="Titre 1">
+            <a:extLst>
+              <a:ext uri="{FF2B5EF4-FFF2-40B4-BE49-F238E27FC236}">
+                <a16:creationId xmlns:a16="http://schemas.microsoft.com/office/drawing/2014/main" id="{8386A4A7-BE19-0785-6BB8-E2D94AEE806A}"/>
+              </a:ext>
+            </a:extLst>
+          </p:cNvPr>
+          <p:cNvSpPr txBox="1">
+            <a:spLocks/>
+          </p:cNvSpPr>
+          <p:nvPr/>
+        </p:nvSpPr>
+        <p:spPr>
+          <a:xfrm>
+            <a:off x="581192" y="702156"/>
+            <a:ext cx="6584242" cy="529878"/>
+          </a:xfrm>
+          <a:prstGeom prst="rect">
+            <a:avLst/>
+          </a:prstGeom>
+        </p:spPr>
+        <p:txBody>
+          <a:bodyPr/>
+          <a:lstStyle>
+            <a:lvl1pPr algn="l" defTabSz="457200" rtl="0" eaLnBrk="1" latinLnBrk="0" hangingPunct="1">
+              <a:lnSpc>
+                <a:spcPct val="100000"/>
+              </a:lnSpc>
+              <a:spcBef>
+                <a:spcPct val="0"/>
+              </a:spcBef>
+              <a:buNone/>
+              <a:defRPr sz="2800" b="0" kern="1200" cap="all">
+                <a:solidFill>
+                  <a:schemeClr val="tx1">
+                    <a:lumMod val="75000"/>
+                    <a:lumOff val="25000"/>
+                  </a:schemeClr>
+                </a:solidFill>
+                <a:latin typeface="+mj-lt"/>
+                <a:ea typeface="+mj-ea"/>
+                <a:cs typeface="+mj-cs"/>
+              </a:defRPr>
+            </a:lvl1pPr>
+            <a:lvl2pPr eaLnBrk="1" hangingPunct="1">
+              <a:defRPr>
+                <a:solidFill>
+                  <a:schemeClr val="tx2"/>
+                </a:solidFill>
+              </a:defRPr>
+            </a:lvl2pPr>
+            <a:lvl3pPr eaLnBrk="1" hangingPunct="1">
+              <a:defRPr>
+                <a:solidFill>
+                  <a:schemeClr val="tx2"/>
+                </a:solidFill>
+              </a:defRPr>
+            </a:lvl3pPr>
+            <a:lvl4pPr eaLnBrk="1" hangingPunct="1">
+              <a:defRPr>
+                <a:solidFill>
+                  <a:schemeClr val="tx2"/>
+                </a:solidFill>
+              </a:defRPr>
+            </a:lvl4pPr>
+            <a:lvl5pPr eaLnBrk="1" hangingPunct="1">
+              <a:defRPr>
+                <a:solidFill>
+                  <a:schemeClr val="tx2"/>
+                </a:solidFill>
+              </a:defRPr>
+            </a:lvl5pPr>
+            <a:lvl6pPr eaLnBrk="1" hangingPunct="1">
+              <a:defRPr>
+                <a:solidFill>
+                  <a:schemeClr val="tx2"/>
+                </a:solidFill>
+              </a:defRPr>
+            </a:lvl6pPr>
+            <a:lvl7pPr eaLnBrk="1" hangingPunct="1">
+              <a:defRPr>
+                <a:solidFill>
+                  <a:schemeClr val="tx2"/>
+                </a:solidFill>
+              </a:defRPr>
+            </a:lvl7pPr>
+            <a:lvl8pPr eaLnBrk="1" hangingPunct="1">
+              <a:defRPr>
+                <a:solidFill>
+                  <a:schemeClr val="tx2"/>
+                </a:solidFill>
+              </a:defRPr>
+            </a:lvl8pPr>
+            <a:lvl9pPr eaLnBrk="1" hangingPunct="1">
+              <a:defRPr>
+                <a:solidFill>
+                  <a:schemeClr val="tx2"/>
+                </a:solidFill>
+              </a:defRPr>
+            </a:lvl9pPr>
+          </a:lstStyle>
+          <a:p>
+            <a:r>
+              <a:rPr lang="fr-FR" dirty="0"/>
+              <a:t>5. Déploiement Client</a:t>
+            </a:r>
           </a:p>
         </p:txBody>
       </p:sp>
       <p:pic>
         <p:nvPicPr>
-          <p:cNvPr id="7" name="Image 6">
+          <p:cNvPr id="9" name="Image 8">
             <a:extLst>
               <a:ext uri="{FF2B5EF4-FFF2-40B4-BE49-F238E27FC236}">
-                <a16:creationId xmlns:a16="http://schemas.microsoft.com/office/drawing/2014/main" id="{B065B291-4E16-B68C-F853-0712A7C800E1}"/>
+                <a16:creationId xmlns:a16="http://schemas.microsoft.com/office/drawing/2014/main" id="{6022BE23-C111-1CC6-90FD-42FFDF3B81AB}"/>
               </a:ext>
             </a:extLst>
           </p:cNvPr>
@@ -10515,13 +10677,14 @@
         </p:nvPicPr>
         <p:blipFill>
           <a:blip r:embed="rId3"/>
-          <a:srcRect l="31048" r="32977"/>
-          <a:stretch/>
+          <a:stretch>
+            <a:fillRect/>
+          </a:stretch>
         </p:blipFill>
         <p:spPr>
           <a:xfrm>
-            <a:off x="3702149" y="3429000"/>
-            <a:ext cx="1732492" cy="2441365"/>
+            <a:off x="7605951" y="1885304"/>
+            <a:ext cx="1728279" cy="685176"/>
           </a:xfrm>
           <a:prstGeom prst="rect">
             <a:avLst/>
@@ -10532,6 +10695,459 @@
     <p:extLst>
       <p:ext uri="{BB962C8B-B14F-4D97-AF65-F5344CB8AC3E}">
         <p14:creationId xmlns:p14="http://schemas.microsoft.com/office/powerpoint/2010/main" val="571924256"/>
+      </p:ext>
+    </p:extLst>
+  </p:cSld>
+  <p:clrMapOvr>
+    <a:masterClrMapping/>
+  </p:clrMapOvr>
+</p:sld>
+</file>
+
+<file path=ppt/slides/slide11.xml><?xml version="1.0" encoding="utf-8"?>
+<p:sld xmlns:a="http://schemas.openxmlformats.org/drawingml/2006/main" xmlns:r="http://schemas.openxmlformats.org/officeDocument/2006/relationships" xmlns:p="http://schemas.openxmlformats.org/presentationml/2006/main">
+  <p:cSld>
+    <p:spTree>
+      <p:nvGrpSpPr>
+        <p:cNvPr id="1" name=""/>
+        <p:cNvGrpSpPr/>
+        <p:nvPr/>
+      </p:nvGrpSpPr>
+      <p:grpSpPr>
+        <a:xfrm>
+          <a:off x="0" y="0"/>
+          <a:ext cx="0" cy="0"/>
+          <a:chOff x="0" y="0"/>
+          <a:chExt cx="0" cy="0"/>
+        </a:xfrm>
+      </p:grpSpPr>
+      <p:pic>
+        <p:nvPicPr>
+          <p:cNvPr id="6" name="Image 5">
+            <a:extLst>
+              <a:ext uri="{FF2B5EF4-FFF2-40B4-BE49-F238E27FC236}">
+                <a16:creationId xmlns:a16="http://schemas.microsoft.com/office/drawing/2014/main" id="{AD831A83-AC78-88FD-BB6D-F241E607DFB8}"/>
+              </a:ext>
+            </a:extLst>
+          </p:cNvPr>
+          <p:cNvPicPr>
+            <a:picLocks noChangeAspect="1"/>
+          </p:cNvPicPr>
+          <p:nvPr/>
+        </p:nvPicPr>
+        <p:blipFill>
+          <a:blip r:embed="rId3"/>
+          <a:stretch>
+            <a:fillRect/>
+          </a:stretch>
+        </p:blipFill>
+        <p:spPr>
+          <a:xfrm>
+            <a:off x="5421836" y="1455266"/>
+            <a:ext cx="6411582" cy="4520084"/>
+          </a:xfrm>
+          <a:prstGeom prst="rect">
+            <a:avLst/>
+          </a:prstGeom>
+        </p:spPr>
+      </p:pic>
+      <p:sp>
+        <p:nvSpPr>
+          <p:cNvPr id="3" name="Espace réservé du contenu 2">
+            <a:extLst>
+              <a:ext uri="{FF2B5EF4-FFF2-40B4-BE49-F238E27FC236}">
+                <a16:creationId xmlns:a16="http://schemas.microsoft.com/office/drawing/2014/main" id="{CB2FB9F8-72E6-D2C7-0867-FB064512D310}"/>
+              </a:ext>
+            </a:extLst>
+          </p:cNvPr>
+          <p:cNvSpPr>
+            <a:spLocks noGrp="1"/>
+          </p:cNvSpPr>
+          <p:nvPr>
+            <p:ph idx="1"/>
+          </p:nvPr>
+        </p:nvSpPr>
+        <p:spPr>
+          <a:xfrm>
+            <a:off x="581192" y="1336810"/>
+            <a:ext cx="5941528" cy="4638540"/>
+          </a:xfrm>
+        </p:spPr>
+        <p:txBody>
+          <a:bodyPr>
+            <a:normAutofit/>
+          </a:bodyPr>
+          <a:lstStyle/>
+          <a:p>
+            <a:r>
+              <a:rPr lang="en-US" sz="2000" dirty="0"/>
+              <a:t>En Machine Learning </a:t>
+            </a:r>
+            <a:r>
+              <a:rPr lang="en-US" sz="2000" dirty="0" err="1"/>
+              <a:t>l’évidence</a:t>
+            </a:r>
+            <a:r>
+              <a:rPr lang="en-US" sz="2000" dirty="0"/>
+              <a:t> du choix du </a:t>
+            </a:r>
+            <a:r>
+              <a:rPr lang="en-US" sz="2000" dirty="0" err="1"/>
+              <a:t>modèle</a:t>
+            </a:r>
+            <a:r>
+              <a:rPr lang="en-US" sz="2000" dirty="0"/>
+              <a:t> </a:t>
+            </a:r>
+            <a:r>
+              <a:rPr lang="en-US" sz="2000" dirty="0" err="1"/>
+              <a:t>n’existe</a:t>
+            </a:r>
+            <a:r>
+              <a:rPr lang="en-US" sz="2000" dirty="0"/>
+              <a:t> pas; les </a:t>
+            </a:r>
+            <a:r>
+              <a:rPr lang="en-US" sz="2000" dirty="0" err="1"/>
+              <a:t>meilleurs</a:t>
+            </a:r>
+            <a:r>
+              <a:rPr lang="en-US" sz="2000" dirty="0"/>
+              <a:t> </a:t>
+            </a:r>
+            <a:r>
+              <a:rPr lang="en-US" sz="2000" dirty="0" err="1"/>
+              <a:t>résultats</a:t>
+            </a:r>
+            <a:r>
+              <a:rPr lang="en-US" sz="2000" dirty="0"/>
+              <a:t> dependent des données </a:t>
+            </a:r>
+            <a:r>
+              <a:rPr lang="en-US" sz="2000" dirty="0" err="1"/>
+              <a:t>utilisées</a:t>
+            </a:r>
+            <a:r>
+              <a:rPr lang="en-US" sz="2000" dirty="0"/>
+              <a:t>.</a:t>
+            </a:r>
+          </a:p>
+          <a:p>
+            <a:r>
+              <a:rPr lang="en-US" sz="2000" dirty="0"/>
+              <a:t>Le métier </a:t>
+            </a:r>
+            <a:r>
+              <a:rPr lang="en-US" sz="2000" dirty="0" err="1"/>
+              <a:t>tient</a:t>
+            </a:r>
+            <a:r>
+              <a:rPr lang="en-US" sz="2000" dirty="0"/>
+              <a:t> </a:t>
+            </a:r>
+            <a:r>
+              <a:rPr lang="en-US" sz="2000" dirty="0" err="1"/>
+              <a:t>une</a:t>
+            </a:r>
+            <a:r>
+              <a:rPr lang="en-US" sz="2000" dirty="0"/>
+              <a:t> </a:t>
+            </a:r>
+            <a:r>
+              <a:rPr lang="en-US" sz="2000" dirty="0" err="1"/>
+              <a:t>valeur</a:t>
+            </a:r>
+            <a:r>
+              <a:rPr lang="en-US" sz="2000" dirty="0"/>
+              <a:t> </a:t>
+            </a:r>
+            <a:r>
+              <a:rPr lang="en-US" sz="2000" dirty="0" err="1"/>
+              <a:t>prépondérante</a:t>
+            </a:r>
+            <a:r>
+              <a:rPr lang="en-US" sz="2000" dirty="0"/>
+              <a:t> dans </a:t>
+            </a:r>
+            <a:r>
+              <a:rPr lang="en-US" sz="2000" dirty="0" err="1"/>
+              <a:t>ce</a:t>
+            </a:r>
+            <a:r>
+              <a:rPr lang="en-US" sz="2000" dirty="0"/>
+              <a:t> choix</a:t>
+            </a:r>
+          </a:p>
+          <a:p>
+            <a:r>
+              <a:rPr lang="en-US" sz="2000" dirty="0"/>
+              <a:t>L’IA </a:t>
+            </a:r>
+            <a:r>
+              <a:rPr lang="en-US" sz="2000" dirty="0" err="1"/>
+              <a:t>reste</a:t>
+            </a:r>
+            <a:r>
+              <a:rPr lang="en-US" sz="2000" dirty="0"/>
+              <a:t> un formidable </a:t>
+            </a:r>
+            <a:r>
+              <a:rPr lang="en-US" sz="2000" dirty="0" err="1"/>
+              <a:t>outil</a:t>
+            </a:r>
+            <a:r>
+              <a:rPr lang="en-US" sz="2000" dirty="0"/>
+              <a:t> </a:t>
+            </a:r>
+            <a:r>
+              <a:rPr lang="en-US" sz="2000" dirty="0" err="1"/>
+              <a:t>d’aide</a:t>
+            </a:r>
+            <a:r>
+              <a:rPr lang="en-US" sz="2000" dirty="0"/>
+              <a:t> </a:t>
+            </a:r>
+            <a:r>
+              <a:rPr lang="en-US" sz="2000" dirty="0" err="1"/>
+              <a:t>mais</a:t>
+            </a:r>
+            <a:r>
+              <a:rPr lang="en-US" sz="2000" dirty="0"/>
+              <a:t> </a:t>
+            </a:r>
+            <a:r>
+              <a:rPr lang="en-US" sz="2000" dirty="0" err="1"/>
+              <a:t>une</a:t>
+            </a:r>
+            <a:r>
+              <a:rPr lang="en-US" sz="2000" dirty="0"/>
+              <a:t> </a:t>
+            </a:r>
+            <a:r>
+              <a:rPr lang="en-US" sz="2000" dirty="0" err="1"/>
+              <a:t>décision</a:t>
+            </a:r>
+            <a:r>
+              <a:rPr lang="en-US" sz="2000" dirty="0"/>
+              <a:t> finale doit </a:t>
+            </a:r>
+            <a:r>
+              <a:rPr lang="en-US" sz="2000" dirty="0" err="1"/>
+              <a:t>être</a:t>
+            </a:r>
+            <a:r>
+              <a:rPr lang="en-US" sz="2000" dirty="0"/>
+              <a:t> humaine.</a:t>
+            </a:r>
+          </a:p>
+        </p:txBody>
+      </p:sp>
+      <p:sp>
+        <p:nvSpPr>
+          <p:cNvPr id="4" name="Espace réservé de la date 3">
+            <a:extLst>
+              <a:ext uri="{FF2B5EF4-FFF2-40B4-BE49-F238E27FC236}">
+                <a16:creationId xmlns:a16="http://schemas.microsoft.com/office/drawing/2014/main" id="{279C9FBD-AD7F-4649-12C4-C066BE57A369}"/>
+              </a:ext>
+            </a:extLst>
+          </p:cNvPr>
+          <p:cNvSpPr>
+            <a:spLocks noGrp="1"/>
+          </p:cNvSpPr>
+          <p:nvPr>
+            <p:ph type="dt" sz="half" idx="10"/>
+          </p:nvPr>
+        </p:nvSpPr>
+        <p:spPr/>
+        <p:txBody>
+          <a:bodyPr/>
+          <a:lstStyle/>
+          <a:p>
+            <a:pPr rtl="0"/>
+            <a:fld id="{22897033-9A55-4DAC-991D-1FF1921C78B7}" type="datetime1">
+              <a:rPr lang="fr-FR" smtClean="0"/>
+              <a:t>30/06/2026</a:t>
+            </a:fld>
+            <a:endParaRPr lang="en-US" dirty="0"/>
+          </a:p>
+        </p:txBody>
+      </p:sp>
+      <p:sp>
+        <p:nvSpPr>
+          <p:cNvPr id="5" name="Titre 1">
+            <a:extLst>
+              <a:ext uri="{FF2B5EF4-FFF2-40B4-BE49-F238E27FC236}">
+                <a16:creationId xmlns:a16="http://schemas.microsoft.com/office/drawing/2014/main" id="{8386A4A7-BE19-0785-6BB8-E2D94AEE806A}"/>
+              </a:ext>
+            </a:extLst>
+          </p:cNvPr>
+          <p:cNvSpPr txBox="1">
+            <a:spLocks/>
+          </p:cNvSpPr>
+          <p:nvPr/>
+        </p:nvSpPr>
+        <p:spPr>
+          <a:xfrm>
+            <a:off x="581192" y="702156"/>
+            <a:ext cx="6584242" cy="529878"/>
+          </a:xfrm>
+          <a:prstGeom prst="rect">
+            <a:avLst/>
+          </a:prstGeom>
+        </p:spPr>
+        <p:txBody>
+          <a:bodyPr/>
+          <a:lstStyle>
+            <a:lvl1pPr algn="l" defTabSz="457200" rtl="0" eaLnBrk="1" latinLnBrk="0" hangingPunct="1">
+              <a:lnSpc>
+                <a:spcPct val="100000"/>
+              </a:lnSpc>
+              <a:spcBef>
+                <a:spcPct val="0"/>
+              </a:spcBef>
+              <a:buNone/>
+              <a:defRPr sz="2800" b="0" kern="1200" cap="all">
+                <a:solidFill>
+                  <a:schemeClr val="tx1">
+                    <a:lumMod val="75000"/>
+                    <a:lumOff val="25000"/>
+                  </a:schemeClr>
+                </a:solidFill>
+                <a:latin typeface="+mj-lt"/>
+                <a:ea typeface="+mj-ea"/>
+                <a:cs typeface="+mj-cs"/>
+              </a:defRPr>
+            </a:lvl1pPr>
+            <a:lvl2pPr eaLnBrk="1" hangingPunct="1">
+              <a:defRPr>
+                <a:solidFill>
+                  <a:schemeClr val="tx2"/>
+                </a:solidFill>
+              </a:defRPr>
+            </a:lvl2pPr>
+            <a:lvl3pPr eaLnBrk="1" hangingPunct="1">
+              <a:defRPr>
+                <a:solidFill>
+                  <a:schemeClr val="tx2"/>
+                </a:solidFill>
+              </a:defRPr>
+            </a:lvl3pPr>
+            <a:lvl4pPr eaLnBrk="1" hangingPunct="1">
+              <a:defRPr>
+                <a:solidFill>
+                  <a:schemeClr val="tx2"/>
+                </a:solidFill>
+              </a:defRPr>
+            </a:lvl4pPr>
+            <a:lvl5pPr eaLnBrk="1" hangingPunct="1">
+              <a:defRPr>
+                <a:solidFill>
+                  <a:schemeClr val="tx2"/>
+                </a:solidFill>
+              </a:defRPr>
+            </a:lvl5pPr>
+            <a:lvl6pPr eaLnBrk="1" hangingPunct="1">
+              <a:defRPr>
+                <a:solidFill>
+                  <a:schemeClr val="tx2"/>
+                </a:solidFill>
+              </a:defRPr>
+            </a:lvl6pPr>
+            <a:lvl7pPr eaLnBrk="1" hangingPunct="1">
+              <a:defRPr>
+                <a:solidFill>
+                  <a:schemeClr val="tx2"/>
+                </a:solidFill>
+              </a:defRPr>
+            </a:lvl7pPr>
+            <a:lvl8pPr eaLnBrk="1" hangingPunct="1">
+              <a:defRPr>
+                <a:solidFill>
+                  <a:schemeClr val="tx2"/>
+                </a:solidFill>
+              </a:defRPr>
+            </a:lvl8pPr>
+            <a:lvl9pPr eaLnBrk="1" hangingPunct="1">
+              <a:defRPr>
+                <a:solidFill>
+                  <a:schemeClr val="tx2"/>
+                </a:solidFill>
+              </a:defRPr>
+            </a:lvl9pPr>
+          </a:lstStyle>
+          <a:p>
+            <a:r>
+              <a:rPr lang="fr-FR" dirty="0"/>
+              <a:t>5. Conclusion</a:t>
+            </a:r>
+          </a:p>
+        </p:txBody>
+      </p:sp>
+      <p:sp>
+        <p:nvSpPr>
+          <p:cNvPr id="7" name="ZoneTexte 6">
+            <a:extLst>
+              <a:ext uri="{FF2B5EF4-FFF2-40B4-BE49-F238E27FC236}">
+                <a16:creationId xmlns:a16="http://schemas.microsoft.com/office/drawing/2014/main" id="{3C3203B0-7707-A38F-3780-F1B55F829951}"/>
+              </a:ext>
+            </a:extLst>
+          </p:cNvPr>
+          <p:cNvSpPr txBox="1"/>
+          <p:nvPr/>
+        </p:nvSpPr>
+        <p:spPr>
+          <a:xfrm>
+            <a:off x="7051040" y="5975350"/>
+            <a:ext cx="4782378" cy="307777"/>
+          </a:xfrm>
+          <a:prstGeom prst="rect">
+            <a:avLst/>
+          </a:prstGeom>
+          <a:noFill/>
+        </p:spPr>
+        <p:txBody>
+          <a:bodyPr wrap="square" rtlCol="0">
+            <a:spAutoFit/>
+          </a:bodyPr>
+          <a:lstStyle/>
+          <a:p>
+            <a:r>
+              <a:rPr lang="fr-FR" sz="1400" dirty="0">
+                <a:solidFill>
+                  <a:schemeClr val="bg2">
+                    <a:lumMod val="50000"/>
+                  </a:schemeClr>
+                </a:solidFill>
+              </a:rPr>
+              <a:t>Extrait, « </a:t>
+            </a:r>
+            <a:r>
+              <a:rPr lang="fr-FR" sz="1400" dirty="0" err="1">
+                <a:solidFill>
+                  <a:schemeClr val="bg2">
+                    <a:lumMod val="50000"/>
+                  </a:schemeClr>
+                </a:solidFill>
+              </a:rPr>
+              <a:t>reorienter_urgences</a:t>
+            </a:r>
+            <a:r>
+              <a:rPr lang="fr-FR" sz="1400" dirty="0">
+                <a:solidFill>
+                  <a:schemeClr val="bg2">
+                    <a:lumMod val="50000"/>
+                  </a:schemeClr>
+                </a:solidFill>
+              </a:rPr>
+              <a:t>, www.anap.fr, Juin 2026</a:t>
+            </a:r>
+          </a:p>
+        </p:txBody>
+      </p:sp>
+    </p:spTree>
+    <p:extLst>
+      <p:ext uri="{BB962C8B-B14F-4D97-AF65-F5344CB8AC3E}">
+        <p14:creationId xmlns:p14="http://schemas.microsoft.com/office/powerpoint/2010/main" val="4012431276"/>
       </p:ext>
     </p:extLst>
   </p:cSld>
@@ -10602,26 +11218,57 @@
             <p:ph idx="1"/>
           </p:nvPr>
         </p:nvSpPr>
-        <p:spPr/>
+        <p:spPr>
+          <a:xfrm>
+            <a:off x="581193" y="2340864"/>
+            <a:ext cx="5591008" cy="4358110"/>
+          </a:xfrm>
+        </p:spPr>
         <p:txBody>
-          <a:bodyPr/>
+          <a:bodyPr>
+            <a:normAutofit/>
+          </a:bodyPr>
           <a:lstStyle/>
           <a:p>
             <a:r>
               <a:rPr lang="fr-FR" dirty="0"/>
-              <a:t>Personnel</a:t>
-            </a:r>
-          </a:p>
-          <a:p>
+              <a:t>Personnel: position comme data </a:t>
+            </a:r>
+            <a:r>
+              <a:rPr lang="fr-FR" dirty="0" err="1"/>
+              <a:t>scientist</a:t>
+            </a:r>
             <a:r>
               <a:rPr lang="fr-FR" dirty="0"/>
-              <a:t>Projet donné</a:t>
+              <a:t> au sein d'une équipe projet IA, en charge de la conception et de l'évaluation d'un modèle de classification du niveau d'urgence des patients, en lien avec le personnel soignant des urgences.</a:t>
             </a:r>
           </a:p>
           <a:p>
             <a:r>
               <a:rPr lang="fr-FR" dirty="0"/>
-              <a:t>Cible</a:t>
+              <a:t>Projet donné: le temps d’attente peut compromettre la prise en charge des cas les plus critiques. </a:t>
+            </a:r>
+            <a:r>
+              <a:rPr lang="fr-FR" dirty="0" err="1"/>
+              <a:t>Cete</a:t>
+            </a:r>
+            <a:r>
+              <a:rPr lang="fr-FR" dirty="0"/>
+              <a:t> application doit aider au tri actuellement 100% humain (</a:t>
+            </a:r>
+            <a:r>
+              <a:rPr lang="fr-FR" dirty="0" err="1"/>
+              <a:t>requiérant</a:t>
+            </a:r>
+            <a:r>
+              <a:rPr lang="fr-FR" dirty="0"/>
+              <a:t> ces connaissances, soumis au stress, fatigue), et donc à l’erreur </a:t>
+            </a:r>
+          </a:p>
+          <a:p>
+            <a:r>
+              <a:rPr lang="fr-FR" dirty="0"/>
+              <a:t>Cible: l’application devra servir à différents niveaux d’utilisateurs (accueil, infirmiers, médecins) pour prioriser les prises en charge; le rendu doit être simple et interprétable, sans ralentir le processus</a:t>
             </a:r>
           </a:p>
         </p:txBody>
@@ -10650,12 +11297,42 @@
             <a:pPr rtl="0"/>
             <a:fld id="{22897033-9A55-4DAC-991D-1FF1921C78B7}" type="datetime1">
               <a:rPr lang="fr-FR" smtClean="0"/>
-              <a:t>21/06/2026</a:t>
+              <a:t>29/06/2026</a:t>
             </a:fld>
             <a:endParaRPr lang="en-US" dirty="0"/>
           </a:p>
         </p:txBody>
       </p:sp>
+      <p:pic>
+        <p:nvPicPr>
+          <p:cNvPr id="6" name="Image 5">
+            <a:extLst>
+              <a:ext uri="{FF2B5EF4-FFF2-40B4-BE49-F238E27FC236}">
+                <a16:creationId xmlns:a16="http://schemas.microsoft.com/office/drawing/2014/main" id="{5EAA079B-A3FE-2914-C1AB-1AF8BB2861CC}"/>
+              </a:ext>
+            </a:extLst>
+          </p:cNvPr>
+          <p:cNvPicPr>
+            <a:picLocks noChangeAspect="1"/>
+          </p:cNvPicPr>
+          <p:nvPr/>
+        </p:nvPicPr>
+        <p:blipFill>
+          <a:blip r:embed="rId2"/>
+          <a:stretch>
+            <a:fillRect/>
+          </a:stretch>
+        </p:blipFill>
+        <p:spPr>
+          <a:xfrm>
+            <a:off x="7300626" y="1296516"/>
+            <a:ext cx="3664138" cy="4616687"/>
+          </a:xfrm>
+          <a:prstGeom prst="rect">
+            <a:avLst/>
+          </a:prstGeom>
+        </p:spPr>
+      </p:pic>
     </p:spTree>
     <p:extLst>
       <p:ext uri="{BB962C8B-B14F-4D97-AF65-F5344CB8AC3E}">
@@ -11588,6 +12265,15 @@
               <a:buChar char="•"/>
             </a:pPr>
             <a:r>
+              <a:rPr lang="fr-FR" sz="1200" kern="100" dirty="0">
+                <a:effectLst/>
+                <a:latin typeface="Aptos" panose="020B0004020202020204" pitchFamily="34" charset="0"/>
+                <a:ea typeface="Aptos" panose="020B0004020202020204" pitchFamily="34" charset="0"/>
+                <a:cs typeface="Times New Roman" panose="02020603050405020304" pitchFamily="18" charset="0"/>
+              </a:rPr>
+              <a:t>Classiques: </a:t>
+            </a:r>
+            <a:r>
               <a:rPr lang="fr-FR" sz="1200" kern="100" dirty="0" err="1">
                 <a:effectLst/>
                 <a:latin typeface="Aptos" panose="020B0004020202020204" pitchFamily="34" charset="0"/>
@@ -11795,7 +12481,7 @@
                 <a:ea typeface="Aptos" panose="020B0004020202020204" pitchFamily="34" charset="0"/>
                 <a:cs typeface="Times New Roman" panose="02020603050405020304" pitchFamily="18" charset="0"/>
               </a:rPr>
-              <a:t>(ou poids custom favorisant le rappel classe 2) plutôt que l'</a:t>
+              <a:t>(ou poids custom favorisant le rappel classe 2 - urgent) plutôt que l'</a:t>
             </a:r>
             <a:r>
               <a:rPr lang="fr-FR" sz="1200" kern="100" dirty="0" err="1">
@@ -12338,25 +13024,7 @@
                 </a:solidFill>
                 <a:latin typeface="Arial" panose="020B0604020202020204" pitchFamily="34" charset="0"/>
               </a:rPr>
-              <a:t>Régression </a:t>
-            </a:r>
-            <a:r>
-              <a:rPr lang="fr-FR" sz="1600" u="sng" dirty="0" err="1">
-                <a:solidFill>
-                  <a:srgbClr val="000000"/>
-                </a:solidFill>
-                <a:latin typeface="Arial" panose="020B0604020202020204" pitchFamily="34" charset="0"/>
-              </a:rPr>
-              <a:t>logsitique</a:t>
-            </a:r>
-            <a:r>
-              <a:rPr lang="fr-FR" sz="1600" u="sng" dirty="0">
-                <a:solidFill>
-                  <a:srgbClr val="000000"/>
-                </a:solidFill>
-                <a:latin typeface="Arial" panose="020B0604020202020204" pitchFamily="34" charset="0"/>
-              </a:rPr>
-              <a:t> ordinale</a:t>
+              <a:t>Régression logistique ordinale</a:t>
             </a:r>
           </a:p>
           <a:p>
@@ -12395,13 +13063,15 @@
               </a:ext>
             </a:extLst>
           </p:cNvPr>
-          <p:cNvCxnSpPr/>
+          <p:cNvCxnSpPr>
+            <a:cxnSpLocks/>
+          </p:cNvCxnSpPr>
           <p:nvPr/>
         </p:nvCxnSpPr>
         <p:spPr>
           <a:xfrm flipV="1">
-            <a:off x="5852160" y="3051208"/>
-            <a:ext cx="2618072" cy="1953929"/>
+            <a:off x="5903843" y="3051208"/>
+            <a:ext cx="2566389" cy="1809027"/>
           </a:xfrm>
           <a:prstGeom prst="line">
             <a:avLst/>
@@ -12533,7 +13203,7 @@
         </p:nvSpPr>
         <p:spPr>
           <a:xfrm>
-            <a:off x="581192" y="1570847"/>
+            <a:off x="660705" y="1232034"/>
             <a:ext cx="6127616" cy="3596576"/>
           </a:xfrm>
         </p:spPr>
@@ -12619,9 +13289,6 @@
               <a:rPr lang="fr-FR" dirty="0"/>
               <a:t>, métrique métier la plus importante pour ce projet selon moi</a:t>
             </a:r>
-          </a:p>
-          <a:p>
-            <a:endParaRPr lang="fr-FR" dirty="0"/>
           </a:p>
           <a:p>
             <a:endParaRPr lang="en-US" dirty="0"/>
@@ -12774,8 +13441,8 @@
         </p:blipFill>
         <p:spPr>
           <a:xfrm>
-            <a:off x="6394259" y="3977479"/>
-            <a:ext cx="5550694" cy="2448835"/>
+            <a:off x="6578011" y="4143802"/>
+            <a:ext cx="5366942" cy="2367768"/>
           </a:xfrm>
           <a:prstGeom prst="rect">
             <a:avLst/>
@@ -12795,9 +13462,9 @@
           <p:nvPr/>
         </p:nvSpPr>
         <p:spPr>
-          <a:xfrm flipV="1">
-            <a:off x="3636335" y="1818167"/>
-            <a:ext cx="3955312" cy="53162"/>
+          <a:xfrm>
+            <a:off x="3806687" y="1761912"/>
+            <a:ext cx="3784960" cy="56255"/>
           </a:xfrm>
           <a:prstGeom prst="arc">
             <a:avLst/>
@@ -12848,7 +13515,7 @@
         </p:blipFill>
         <p:spPr>
           <a:xfrm>
-            <a:off x="807971" y="4765962"/>
+            <a:off x="968665" y="4536383"/>
             <a:ext cx="4806020" cy="1975187"/>
           </a:xfrm>
           <a:prstGeom prst="rect">
@@ -12888,10 +13555,10 @@
       </p:grpSpPr>
       <p:sp>
         <p:nvSpPr>
-          <p:cNvPr id="2" name="Titre 1">
+          <p:cNvPr id="2" name="Espace réservé de la date 1">
             <a:extLst>
               <a:ext uri="{FF2B5EF4-FFF2-40B4-BE49-F238E27FC236}">
-                <a16:creationId xmlns:a16="http://schemas.microsoft.com/office/drawing/2014/main" id="{2317C321-CD47-C68E-B6DD-6FAF07D7330C}"/>
+                <a16:creationId xmlns:a16="http://schemas.microsoft.com/office/drawing/2014/main" id="{A0C56474-0F5A-9312-B5D8-8AED4AE5CBF9}"/>
               </a:ext>
             </a:extLst>
           </p:cNvPr>
@@ -12899,69 +13566,592 @@
             <a:spLocks noGrp="1"/>
           </p:cNvSpPr>
           <p:nvPr>
-            <p:ph type="title"/>
+            <p:ph type="dt" sz="half" idx="10"/>
           </p:nvPr>
+        </p:nvSpPr>
+        <p:spPr/>
+        <p:txBody>
+          <a:bodyPr/>
+          <a:lstStyle/>
+          <a:p>
+            <a:pPr rtl="0"/>
+            <a:fld id="{ACEC98BE-FCE2-445F-8146-3A7F8CC3881D}" type="datetime1">
+              <a:rPr lang="fr-FR" smtClean="0"/>
+              <a:t>30/06/2026</a:t>
+            </a:fld>
+            <a:endParaRPr lang="en-US" dirty="0"/>
+          </a:p>
+        </p:txBody>
+      </p:sp>
+      <p:graphicFrame>
+        <p:nvGraphicFramePr>
+          <p:cNvPr id="8" name="Tableau 7">
+            <a:extLst>
+              <a:ext uri="{FF2B5EF4-FFF2-40B4-BE49-F238E27FC236}">
+                <a16:creationId xmlns:a16="http://schemas.microsoft.com/office/drawing/2014/main" id="{39E27A16-4F5B-5311-C027-5B76B0B19D99}"/>
+              </a:ext>
+            </a:extLst>
+          </p:cNvPr>
+          <p:cNvGraphicFramePr>
+            <a:graphicFrameLocks noGrp="1"/>
+          </p:cNvGraphicFramePr>
+          <p:nvPr>
+            <p:extLst>
+              <p:ext uri="{D42A27DB-BD31-4B8C-83A1-F6EECF244321}">
+                <p14:modId xmlns:p14="http://schemas.microsoft.com/office/powerpoint/2010/main" val="3028539226"/>
+              </p:ext>
+            </p:extLst>
+          </p:nvPr>
+        </p:nvGraphicFramePr>
+        <p:xfrm>
+          <a:off x="877104" y="2471044"/>
+          <a:ext cx="6728847" cy="3576320"/>
+        </p:xfrm>
+        <a:graphic>
+          <a:graphicData uri="http://schemas.openxmlformats.org/drawingml/2006/table">
+            <a:tbl>
+              <a:tblPr firstRow="1" bandRow="1">
+                <a:tableStyleId>{5C22544A-7EE6-4342-B048-85BDC9FD1C3A}</a:tableStyleId>
+              </a:tblPr>
+              <a:tblGrid>
+                <a:gridCol w="2723173">
+                  <a:extLst>
+                    <a:ext uri="{9D8B030D-6E8A-4147-A177-3AD203B41FA5}">
+                      <a16:colId xmlns:a16="http://schemas.microsoft.com/office/drawing/2014/main" val="3525763507"/>
+                    </a:ext>
+                  </a:extLst>
+                </a:gridCol>
+                <a:gridCol w="4005674">
+                  <a:extLst>
+                    <a:ext uri="{9D8B030D-6E8A-4147-A177-3AD203B41FA5}">
+                      <a16:colId xmlns:a16="http://schemas.microsoft.com/office/drawing/2014/main" val="1365654087"/>
+                    </a:ext>
+                  </a:extLst>
+                </a:gridCol>
+              </a:tblGrid>
+              <a:tr h="370840">
+                <a:tc>
+                  <a:txBody>
+                    <a:bodyPr/>
+                    <a:lstStyle/>
+                    <a:p>
+                      <a:pPr marL="0" marR="0" lvl="0" indent="0" algn="l" defTabSz="457200" rtl="0" eaLnBrk="1" fontAlgn="auto" latinLnBrk="0" hangingPunct="1">
+                        <a:lnSpc>
+                          <a:spcPct val="100000"/>
+                        </a:lnSpc>
+                        <a:spcBef>
+                          <a:spcPts val="0"/>
+                        </a:spcBef>
+                        <a:spcAft>
+                          <a:spcPts val="0"/>
+                        </a:spcAft>
+                        <a:buClrTx/>
+                        <a:buSzTx/>
+                        <a:buFontTx/>
+                        <a:buNone/>
+                        <a:tabLst/>
+                        <a:defRPr/>
+                      </a:pPr>
+                      <a:r>
+                        <a:rPr lang="fr-FR" dirty="0"/>
+                        <a:t>Phase	</a:t>
+                      </a:r>
+                    </a:p>
+                    <a:p>
+                      <a:endParaRPr lang="fr-FR" dirty="0"/>
+                    </a:p>
+                  </a:txBody>
+                  <a:tcPr/>
+                </a:tc>
+                <a:tc>
+                  <a:txBody>
+                    <a:bodyPr/>
+                    <a:lstStyle/>
+                    <a:p>
+                      <a:r>
+                        <a:rPr lang="fr-FR" dirty="0"/>
+                        <a:t>Contenu	</a:t>
+                      </a:r>
+                    </a:p>
+                  </a:txBody>
+                  <a:tcPr/>
+                </a:tc>
+                <a:extLst>
+                  <a:ext uri="{0D108BD9-81ED-4DB2-BD59-A6C34878D82A}">
+                    <a16:rowId xmlns:a16="http://schemas.microsoft.com/office/drawing/2014/main" val="3210776024"/>
+                  </a:ext>
+                </a:extLst>
+              </a:tr>
+              <a:tr h="370840">
+                <a:tc>
+                  <a:txBody>
+                    <a:bodyPr/>
+                    <a:lstStyle/>
+                    <a:p>
+                      <a:r>
+                        <a:rPr lang="fr-FR" dirty="0"/>
+                        <a:t>1 — </a:t>
+                      </a:r>
+                      <a:r>
+                        <a:rPr lang="fr-FR" dirty="0" err="1"/>
+                        <a:t>Serving</a:t>
+                      </a:r>
+                      <a:endParaRPr lang="fr-FR" dirty="0"/>
+                    </a:p>
+                  </a:txBody>
+                  <a:tcPr/>
+                </a:tc>
+                <a:tc>
+                  <a:txBody>
+                    <a:bodyPr/>
+                    <a:lstStyle/>
+                    <a:p>
+                      <a:r>
+                        <a:rPr lang="fr-FR" dirty="0" err="1"/>
+                        <a:t>MLflow</a:t>
+                      </a:r>
+                      <a:r>
+                        <a:rPr lang="fr-FR" dirty="0"/>
+                        <a:t> </a:t>
+                      </a:r>
+                      <a:r>
+                        <a:rPr lang="fr-FR" dirty="0" err="1"/>
+                        <a:t>Registry</a:t>
+                      </a:r>
+                      <a:r>
+                        <a:rPr lang="fr-FR" dirty="0"/>
+                        <a:t>, API /</a:t>
+                      </a:r>
+                      <a:r>
+                        <a:rPr lang="fr-FR" dirty="0" err="1"/>
+                        <a:t>predict</a:t>
+                      </a:r>
+                      <a:r>
+                        <a:rPr lang="fr-FR" dirty="0"/>
+                        <a:t>, frontend </a:t>
+                      </a:r>
+                      <a:r>
+                        <a:rPr lang="fr-FR" dirty="0" err="1"/>
+                        <a:t>Streamlit</a:t>
+                      </a:r>
+                      <a:r>
+                        <a:rPr lang="fr-FR" dirty="0"/>
+                        <a:t>, feedback différé</a:t>
+                      </a:r>
+                    </a:p>
+                  </a:txBody>
+                  <a:tcPr/>
+                </a:tc>
+                <a:extLst>
+                  <a:ext uri="{0D108BD9-81ED-4DB2-BD59-A6C34878D82A}">
+                    <a16:rowId xmlns:a16="http://schemas.microsoft.com/office/drawing/2014/main" val="3011417739"/>
+                  </a:ext>
+                </a:extLst>
+              </a:tr>
+              <a:tr h="370840">
+                <a:tc>
+                  <a:txBody>
+                    <a:bodyPr/>
+                    <a:lstStyle/>
+                    <a:p>
+                      <a:r>
+                        <a:rPr lang="fr-FR" dirty="0"/>
+                        <a:t>2 — Monitoring du modèle</a:t>
+                      </a:r>
+                    </a:p>
+                  </a:txBody>
+                  <a:tcPr/>
+                </a:tc>
+                <a:tc>
+                  <a:txBody>
+                    <a:bodyPr/>
+                    <a:lstStyle/>
+                    <a:p>
+                      <a:r>
+                        <a:rPr lang="fr-FR" dirty="0"/>
+                        <a:t>Drift data/concept via </a:t>
+                      </a:r>
+                      <a:r>
+                        <a:rPr lang="fr-FR" dirty="0" err="1"/>
+                        <a:t>Evidently</a:t>
+                      </a:r>
+                      <a:r>
+                        <a:rPr lang="fr-FR" dirty="0"/>
+                        <a:t> AI</a:t>
+                      </a:r>
+                    </a:p>
+                  </a:txBody>
+                  <a:tcPr/>
+                </a:tc>
+                <a:extLst>
+                  <a:ext uri="{0D108BD9-81ED-4DB2-BD59-A6C34878D82A}">
+                    <a16:rowId xmlns:a16="http://schemas.microsoft.com/office/drawing/2014/main" val="3399062571"/>
+                  </a:ext>
+                </a:extLst>
+              </a:tr>
+              <a:tr h="370840">
+                <a:tc>
+                  <a:txBody>
+                    <a:bodyPr/>
+                    <a:lstStyle/>
+                    <a:p>
+                      <a:r>
+                        <a:rPr lang="fr-FR" dirty="0"/>
+                        <a:t>3 — Orchestration</a:t>
+                      </a:r>
+                    </a:p>
+                  </a:txBody>
+                  <a:tcPr/>
+                </a:tc>
+                <a:tc>
+                  <a:txBody>
+                    <a:bodyPr/>
+                    <a:lstStyle/>
+                    <a:p>
+                      <a:r>
+                        <a:rPr lang="fr-FR" dirty="0" err="1"/>
+                        <a:t>Prefect</a:t>
+                      </a:r>
+                      <a:r>
+                        <a:rPr lang="fr-FR" dirty="0"/>
+                        <a:t> : drift planifié → réentraînement auto → promotion conditionnelle en « production »</a:t>
+                      </a:r>
+                    </a:p>
+                  </a:txBody>
+                  <a:tcPr/>
+                </a:tc>
+                <a:extLst>
+                  <a:ext uri="{0D108BD9-81ED-4DB2-BD59-A6C34878D82A}">
+                    <a16:rowId xmlns:a16="http://schemas.microsoft.com/office/drawing/2014/main" val="219729655"/>
+                  </a:ext>
+                </a:extLst>
+              </a:tr>
+              <a:tr h="360566">
+                <a:tc>
+                  <a:txBody>
+                    <a:bodyPr/>
+                    <a:lstStyle/>
+                    <a:p>
+                      <a:r>
+                        <a:rPr lang="fr-FR" dirty="0"/>
+                        <a:t>4 — CI/CD	</a:t>
+                      </a:r>
+                    </a:p>
+                  </a:txBody>
+                  <a:tcPr/>
+                </a:tc>
+                <a:tc>
+                  <a:txBody>
+                    <a:bodyPr/>
+                    <a:lstStyle/>
+                    <a:p>
+                      <a:r>
+                        <a:rPr lang="fr-FR" dirty="0"/>
+                        <a:t>GitHub Actions (tests, </a:t>
+                      </a:r>
+                      <a:r>
+                        <a:rPr lang="fr-FR" dirty="0" err="1"/>
+                        <a:t>build</a:t>
+                      </a:r>
+                      <a:r>
+                        <a:rPr lang="fr-FR" dirty="0"/>
+                        <a:t>) </a:t>
+                      </a:r>
+                    </a:p>
+                    <a:p>
+                      <a:r>
+                        <a:rPr lang="fr-FR" dirty="0"/>
+                        <a:t>+ </a:t>
+                      </a:r>
+                      <a:r>
+                        <a:rPr lang="fr-FR" dirty="0" err="1"/>
+                        <a:t>DockerHub</a:t>
+                      </a:r>
+                      <a:r>
+                        <a:rPr lang="fr-FR" dirty="0"/>
+                        <a:t> (push des 5 images)</a:t>
+                      </a:r>
+                    </a:p>
+                  </a:txBody>
+                  <a:tcPr/>
+                </a:tc>
+                <a:extLst>
+                  <a:ext uri="{0D108BD9-81ED-4DB2-BD59-A6C34878D82A}">
+                    <a16:rowId xmlns:a16="http://schemas.microsoft.com/office/drawing/2014/main" val="2930490373"/>
+                  </a:ext>
+                </a:extLst>
+              </a:tr>
+              <a:tr h="370840">
+                <a:tc>
+                  <a:txBody>
+                    <a:bodyPr/>
+                    <a:lstStyle/>
+                    <a:p>
+                      <a:r>
+                        <a:rPr lang="fr-FR" dirty="0"/>
+                        <a:t>5 — Versioning données</a:t>
+                      </a:r>
+                    </a:p>
+                  </a:txBody>
+                  <a:tcPr/>
+                </a:tc>
+                <a:tc>
+                  <a:txBody>
+                    <a:bodyPr/>
+                    <a:lstStyle/>
+                    <a:p>
+                      <a:r>
+                        <a:rPr lang="fr-FR" dirty="0"/>
+                        <a:t>Data Version Control du modèle</a:t>
+                      </a:r>
+                    </a:p>
+                  </a:txBody>
+                  <a:tcPr/>
+                </a:tc>
+                <a:extLst>
+                  <a:ext uri="{0D108BD9-81ED-4DB2-BD59-A6C34878D82A}">
+                    <a16:rowId xmlns:a16="http://schemas.microsoft.com/office/drawing/2014/main" val="4266663745"/>
+                  </a:ext>
+                </a:extLst>
+              </a:tr>
+            </a:tbl>
+          </a:graphicData>
+        </a:graphic>
+      </p:graphicFrame>
+      <p:pic>
+        <p:nvPicPr>
+          <p:cNvPr id="9" name="Image 8">
+            <a:extLst>
+              <a:ext uri="{FF2B5EF4-FFF2-40B4-BE49-F238E27FC236}">
+                <a16:creationId xmlns:a16="http://schemas.microsoft.com/office/drawing/2014/main" id="{889A300F-51E5-1EC1-F7DB-E96A8369DAEE}"/>
+              </a:ext>
+            </a:extLst>
+          </p:cNvPr>
+          <p:cNvPicPr>
+            <a:picLocks noChangeAspect="1"/>
+          </p:cNvPicPr>
+          <p:nvPr/>
+        </p:nvPicPr>
+        <p:blipFill>
+          <a:blip r:embed="rId2"/>
+          <a:stretch>
+            <a:fillRect/>
+          </a:stretch>
+        </p:blipFill>
+        <p:spPr>
+          <a:xfrm>
+            <a:off x="8859603" y="581755"/>
+            <a:ext cx="3111109" cy="4457273"/>
+          </a:xfrm>
+          <a:prstGeom prst="rect">
+            <a:avLst/>
+          </a:prstGeom>
+        </p:spPr>
+      </p:pic>
+      <p:sp>
+        <p:nvSpPr>
+          <p:cNvPr id="10" name="Titre 1">
+            <a:extLst>
+              <a:ext uri="{FF2B5EF4-FFF2-40B4-BE49-F238E27FC236}">
+                <a16:creationId xmlns:a16="http://schemas.microsoft.com/office/drawing/2014/main" id="{57B7D411-14CB-8390-151A-D93AD96D7CAB}"/>
+              </a:ext>
+            </a:extLst>
+          </p:cNvPr>
+          <p:cNvSpPr txBox="1">
+            <a:spLocks/>
+          </p:cNvSpPr>
+          <p:nvPr/>
         </p:nvSpPr>
         <p:spPr>
           <a:xfrm>
             <a:off x="581192" y="702156"/>
-            <a:ext cx="11029616" cy="529878"/>
-          </a:xfrm>
-        </p:spPr>
-        <p:txBody>
-          <a:bodyPr/>
-          <a:lstStyle/>
-          <a:p>
-            <a:r>
-              <a:rPr lang="fr-FR" dirty="0"/>
-              <a:t>4. Industrialisation et déploiement</a:t>
-            </a:r>
-          </a:p>
-        </p:txBody>
-      </p:sp>
-      <p:sp>
-        <p:nvSpPr>
-          <p:cNvPr id="10" name="ZoneTexte 9">
-            <a:extLst>
-              <a:ext uri="{FF2B5EF4-FFF2-40B4-BE49-F238E27FC236}">
-                <a16:creationId xmlns:a16="http://schemas.microsoft.com/office/drawing/2014/main" id="{FFCC2D4B-2659-5D25-1225-BF58198A918B}"/>
-              </a:ext>
-            </a:extLst>
-          </p:cNvPr>
-          <p:cNvSpPr txBox="1"/>
-          <p:nvPr/>
-        </p:nvSpPr>
-        <p:spPr>
-          <a:xfrm>
-            <a:off x="2690037" y="2541181"/>
-            <a:ext cx="5518298" cy="830997"/>
+            <a:ext cx="6584242" cy="529878"/>
           </a:xfrm>
           <a:prstGeom prst="rect">
             <a:avLst/>
           </a:prstGeom>
-          <a:noFill/>
         </p:spPr>
         <p:txBody>
-          <a:bodyPr wrap="square" rtlCol="0">
-            <a:spAutoFit/>
-          </a:bodyPr>
-          <a:lstStyle/>
-          <a:p>
-            <a:r>
-              <a:rPr lang="fr-FR" sz="4800" dirty="0">
-                <a:highlight>
-                  <a:srgbClr val="FFFF00"/>
-                </a:highlight>
-              </a:rPr>
-              <a:t>A FAIRE</a:t>
+          <a:bodyPr/>
+          <a:lstStyle>
+            <a:lvl1pPr algn="l" defTabSz="457200" rtl="0" eaLnBrk="1" latinLnBrk="0" hangingPunct="1">
+              <a:lnSpc>
+                <a:spcPct val="100000"/>
+              </a:lnSpc>
+              <a:spcBef>
+                <a:spcPct val="0"/>
+              </a:spcBef>
+              <a:buNone/>
+              <a:defRPr sz="2800" b="0" kern="1200" cap="all">
+                <a:solidFill>
+                  <a:schemeClr val="tx1">
+                    <a:lumMod val="75000"/>
+                    <a:lumOff val="25000"/>
+                  </a:schemeClr>
+                </a:solidFill>
+                <a:latin typeface="+mj-lt"/>
+                <a:ea typeface="+mj-ea"/>
+                <a:cs typeface="+mj-cs"/>
+              </a:defRPr>
+            </a:lvl1pPr>
+            <a:lvl2pPr eaLnBrk="1" hangingPunct="1">
+              <a:defRPr>
+                <a:solidFill>
+                  <a:schemeClr val="tx2"/>
+                </a:solidFill>
+              </a:defRPr>
+            </a:lvl2pPr>
+            <a:lvl3pPr eaLnBrk="1" hangingPunct="1">
+              <a:defRPr>
+                <a:solidFill>
+                  <a:schemeClr val="tx2"/>
+                </a:solidFill>
+              </a:defRPr>
+            </a:lvl3pPr>
+            <a:lvl4pPr eaLnBrk="1" hangingPunct="1">
+              <a:defRPr>
+                <a:solidFill>
+                  <a:schemeClr val="tx2"/>
+                </a:solidFill>
+              </a:defRPr>
+            </a:lvl4pPr>
+            <a:lvl5pPr eaLnBrk="1" hangingPunct="1">
+              <a:defRPr>
+                <a:solidFill>
+                  <a:schemeClr val="tx2"/>
+                </a:solidFill>
+              </a:defRPr>
+            </a:lvl5pPr>
+            <a:lvl6pPr eaLnBrk="1" hangingPunct="1">
+              <a:defRPr>
+                <a:solidFill>
+                  <a:schemeClr val="tx2"/>
+                </a:solidFill>
+              </a:defRPr>
+            </a:lvl6pPr>
+            <a:lvl7pPr eaLnBrk="1" hangingPunct="1">
+              <a:defRPr>
+                <a:solidFill>
+                  <a:schemeClr val="tx2"/>
+                </a:solidFill>
+              </a:defRPr>
+            </a:lvl7pPr>
+            <a:lvl8pPr eaLnBrk="1" hangingPunct="1">
+              <a:defRPr>
+                <a:solidFill>
+                  <a:schemeClr val="tx2"/>
+                </a:solidFill>
+              </a:defRPr>
+            </a:lvl8pPr>
+            <a:lvl9pPr eaLnBrk="1" hangingPunct="1">
+              <a:defRPr>
+                <a:solidFill>
+                  <a:schemeClr val="tx2"/>
+                </a:solidFill>
+              </a:defRPr>
+            </a:lvl9pPr>
+          </a:lstStyle>
+          <a:p>
+            <a:r>
+              <a:rPr lang="fr-FR" dirty="0"/>
+              <a:t>4. Industrialisation et déploiement</a:t>
             </a:r>
           </a:p>
         </p:txBody>
       </p:sp>
+      <p:pic>
+        <p:nvPicPr>
+          <p:cNvPr id="12" name="Image 11">
+            <a:extLst>
+              <a:ext uri="{FF2B5EF4-FFF2-40B4-BE49-F238E27FC236}">
+                <a16:creationId xmlns:a16="http://schemas.microsoft.com/office/drawing/2014/main" id="{8C076B2E-D09C-BBFF-0565-8D64F8D52DE6}"/>
+              </a:ext>
+            </a:extLst>
+          </p:cNvPr>
+          <p:cNvPicPr>
+            <a:picLocks noChangeAspect="1"/>
+          </p:cNvPicPr>
+          <p:nvPr/>
+        </p:nvPicPr>
+        <p:blipFill>
+          <a:blip r:embed="rId3"/>
+          <a:stretch>
+            <a:fillRect/>
+          </a:stretch>
+        </p:blipFill>
+        <p:spPr>
+          <a:xfrm>
+            <a:off x="8192641" y="5087427"/>
+            <a:ext cx="492860" cy="492860"/>
+          </a:xfrm>
+          <a:prstGeom prst="rect">
+            <a:avLst/>
+          </a:prstGeom>
+        </p:spPr>
+      </p:pic>
+      <p:pic>
+        <p:nvPicPr>
+          <p:cNvPr id="14" name="Image 13">
+            <a:extLst>
+              <a:ext uri="{FF2B5EF4-FFF2-40B4-BE49-F238E27FC236}">
+                <a16:creationId xmlns:a16="http://schemas.microsoft.com/office/drawing/2014/main" id="{43E518B8-D7EF-8BCC-6EBD-AA6AC9242E41}"/>
+              </a:ext>
+            </a:extLst>
+          </p:cNvPr>
+          <p:cNvPicPr>
+            <a:picLocks noChangeAspect="1"/>
+          </p:cNvPicPr>
+          <p:nvPr/>
+        </p:nvPicPr>
+        <p:blipFill>
+          <a:blip r:embed="rId4"/>
+          <a:stretch>
+            <a:fillRect/>
+          </a:stretch>
+        </p:blipFill>
+        <p:spPr>
+          <a:xfrm>
+            <a:off x="7626695" y="5067447"/>
+            <a:ext cx="455895" cy="492860"/>
+          </a:xfrm>
+          <a:prstGeom prst="rect">
+            <a:avLst/>
+          </a:prstGeom>
+        </p:spPr>
+      </p:pic>
+      <p:pic>
+        <p:nvPicPr>
+          <p:cNvPr id="15" name="Image 14">
+            <a:extLst>
+              <a:ext uri="{FF2B5EF4-FFF2-40B4-BE49-F238E27FC236}">
+                <a16:creationId xmlns:a16="http://schemas.microsoft.com/office/drawing/2014/main" id="{64B733CE-FD4A-477C-AAB0-9EE778BCF70C}"/>
+              </a:ext>
+            </a:extLst>
+          </p:cNvPr>
+          <p:cNvPicPr>
+            <a:picLocks noChangeAspect="1"/>
+          </p:cNvPicPr>
+          <p:nvPr/>
+        </p:nvPicPr>
+        <p:blipFill>
+          <a:blip r:embed="rId5"/>
+          <a:srcRect t="58159"/>
+          <a:stretch/>
+        </p:blipFill>
+        <p:spPr>
+          <a:xfrm>
+            <a:off x="9365503" y="5039029"/>
+            <a:ext cx="2605209" cy="1323239"/>
+          </a:xfrm>
+          <a:prstGeom prst="rect">
+            <a:avLst/>
+          </a:prstGeom>
+        </p:spPr>
+      </p:pic>
     </p:spTree>
     <p:extLst>
       <p:ext uri="{BB962C8B-B14F-4D97-AF65-F5344CB8AC3E}">
-        <p14:creationId xmlns:p14="http://schemas.microsoft.com/office/powerpoint/2010/main" val="1805566536"/>
+        <p14:creationId xmlns:p14="http://schemas.microsoft.com/office/powerpoint/2010/main" val="378257235"/>
       </p:ext>
     </p:extLst>
   </p:cSld>
